--- a/Slides/Semana 2/semana_2_slides.pptx
+++ b/Slides/Semana 2/semana_2_slides.pptx
@@ -793,7 +793,7 @@
 - "Que exemplo de extensão vocês já viram e não sabiam que era extensão?"
 - "Como o curso de Jogos Digitais poderia responder a uma demanda real da comunidade?"
 Avaliação nesta semana: observação inicial e informal de Planejamento (viabilidade das ideias) e Trabalho em Equipe (participação de todos), conforme Rubrica de Avaliação — sem atribuição de nota.
-Fonte: Plano Semanal Semana 2, Cronograma, CLAUDE.md, COURSE_CONTEXT.md, PEDAGOGICAL_RULES.md, EXTENSION_PROJECT_GUIDE.md.</a:t>
+Fonte: Plano Semanal Semana 2, Cronograma.</a:t>
             </a:r>
             <a:endParaRPr lang="en-US" dirty="0"/>
           </a:p>
